--- a/ppt/IoTAI29-ExecuTorch.pptx
+++ b/ppt/IoTAI29-ExecuTorch.pptx
@@ -5080,7 +5080,7 @@
           <a:p>
             <a:r>
               <a:rPr lang="fr-FR" dirty="0"/>
-              <a:t>TP 28</a:t>
+              <a:t>TP 30</a:t>
             </a:r>
           </a:p>
         </p:txBody>

--- a/ppt/IoTAI29-ExecuTorch.pptx
+++ b/ppt/IoTAI29-ExecuTorch.pptx
@@ -5,10 +5,10 @@
     <p:sldMasterId id="2147483653" r:id="rId1"/>
   </p:sldMasterIdLst>
   <p:notesMasterIdLst>
-    <p:notesMasterId r:id="rId22"/>
+    <p:notesMasterId r:id="rId21"/>
   </p:notesMasterIdLst>
   <p:handoutMasterIdLst>
-    <p:handoutMasterId r:id="rId23"/>
+    <p:handoutMasterId r:id="rId22"/>
   </p:handoutMasterIdLst>
   <p:sldIdLst>
     <p:sldId id="264" r:id="rId2"/>
@@ -17,20 +17,19 @@
     <p:sldId id="266" r:id="rId5"/>
     <p:sldId id="295" r:id="rId6"/>
     <p:sldId id="298" r:id="rId7"/>
-    <p:sldId id="296" r:id="rId8"/>
-    <p:sldId id="299" r:id="rId9"/>
-    <p:sldId id="300" r:id="rId10"/>
-    <p:sldId id="297" r:id="rId11"/>
-    <p:sldId id="304" r:id="rId12"/>
-    <p:sldId id="301" r:id="rId13"/>
-    <p:sldId id="302" r:id="rId14"/>
-    <p:sldId id="303" r:id="rId15"/>
-    <p:sldId id="306" r:id="rId16"/>
-    <p:sldId id="307" r:id="rId17"/>
-    <p:sldId id="309" r:id="rId18"/>
-    <p:sldId id="310" r:id="rId19"/>
+    <p:sldId id="299" r:id="rId8"/>
+    <p:sldId id="300" r:id="rId9"/>
+    <p:sldId id="297" r:id="rId10"/>
+    <p:sldId id="304" r:id="rId11"/>
+    <p:sldId id="301" r:id="rId12"/>
+    <p:sldId id="302" r:id="rId13"/>
+    <p:sldId id="303" r:id="rId14"/>
+    <p:sldId id="306" r:id="rId15"/>
+    <p:sldId id="307" r:id="rId16"/>
+    <p:sldId id="309" r:id="rId17"/>
+    <p:sldId id="310" r:id="rId18"/>
+    <p:sldId id="308" r:id="rId19"/>
     <p:sldId id="289" r:id="rId20"/>
-    <p:sldId id="308" r:id="rId21"/>
   </p:sldIdLst>
   <p:sldSz cx="9144000" cy="6858000" type="screen4x3"/>
   <p:notesSz cx="6648450" cy="9782175"/>
@@ -3789,7 +3788,7 @@
           <p:cNvPr id="2" name="Titre 1">
             <a:extLst>
               <a:ext uri="{FF2B5EF4-FFF2-40B4-BE49-F238E27FC236}">
-                <a16:creationId xmlns:a16="http://schemas.microsoft.com/office/drawing/2014/main" id="{739299C7-45F1-CB31-0C77-60B208C9F4CA}"/>
+                <a16:creationId xmlns:a16="http://schemas.microsoft.com/office/drawing/2014/main" id="{D60E1EF0-2338-E50F-9B62-EB98A35EB5CF}"/>
               </a:ext>
             </a:extLst>
           </p:cNvPr>
@@ -3806,9 +3805,18 @@
           <a:lstStyle/>
           <a:p>
             <a:r>
-              <a:rPr lang="fr-FR" dirty="0"/>
-              <a:t>Performances</a:t>
-            </a:r>
+              <a:rPr lang="fr-FR" dirty="0" err="1"/>
+              <a:t>PyTorch</a:t>
+            </a:r>
+            <a:r>
+              <a:rPr lang="fr-FR" dirty="0"/>
+              <a:t> </a:t>
+            </a:r>
+            <a:r>
+              <a:rPr lang="fr-FR" dirty="0" err="1"/>
+              <a:t>Embeded</a:t>
+            </a:r>
+            <a:endParaRPr lang="fr-FR" dirty="0"/>
           </a:p>
         </p:txBody>
       </p:sp>
@@ -3817,7 +3825,7 @@
           <p:cNvPr id="3" name="Espace réservé du contenu 2">
             <a:extLst>
               <a:ext uri="{FF2B5EF4-FFF2-40B4-BE49-F238E27FC236}">
-                <a16:creationId xmlns:a16="http://schemas.microsoft.com/office/drawing/2014/main" id="{1107D6C1-ECDF-54DE-2F7E-342C74572A72}"/>
+                <a16:creationId xmlns:a16="http://schemas.microsoft.com/office/drawing/2014/main" id="{756C52CF-574A-BAF7-520C-F55D7FB344DC}"/>
               </a:ext>
             </a:extLst>
           </p:cNvPr>
@@ -3834,22 +3842,65 @@
           <a:lstStyle/>
           <a:p>
             <a:r>
-              <a:rPr lang="fr-FR" dirty="0"/>
-              <a:t>Hautes performances, avec accélération matérielle et optimisation du modèle</a:t>
-            </a:r>
-          </a:p>
-          <a:p>
-            <a:r>
-              <a:rPr lang="fr-FR" dirty="0"/>
-              <a:t>Compatible GPU, NPU &amp; DSP</a:t>
-            </a:r>
+              <a:rPr lang="fr-FR" dirty="0" err="1"/>
+              <a:t>ExecuTorch</a:t>
+            </a:r>
+            <a:r>
+              <a:rPr lang="fr-FR" dirty="0"/>
+              <a:t> s'appuie sur des plateformes pour générer le PTE</a:t>
+            </a:r>
+          </a:p>
+          <a:p>
+            <a:pPr lvl="1"/>
+            <a:r>
+              <a:rPr lang="fr-FR" dirty="0" err="1"/>
+              <a:t>PyTorch</a:t>
+            </a:r>
+            <a:r>
+              <a:rPr lang="fr-FR" dirty="0"/>
+              <a:t> </a:t>
+            </a:r>
+            <a:r>
+              <a:rPr lang="fr-FR" dirty="0" err="1"/>
+              <a:t>Embeded</a:t>
+            </a:r>
+            <a:endParaRPr lang="fr-FR" dirty="0"/>
+          </a:p>
+          <a:p>
+            <a:r>
+              <a:rPr lang="fr-FR" dirty="0" err="1"/>
+              <a:t>Quantisation</a:t>
+            </a:r>
+            <a:r>
+              <a:rPr lang="fr-FR" dirty="0"/>
+              <a:t> disponible</a:t>
+            </a:r>
+          </a:p>
+          <a:p>
+            <a:pPr lvl="1"/>
+            <a:r>
+              <a:rPr lang="fr-FR" dirty="0"/>
+              <a:t>En FP32 ne nécessite aucune plateforme côté serveur</a:t>
+            </a:r>
+          </a:p>
+          <a:p>
+            <a:pPr lvl="1"/>
+            <a:r>
+              <a:rPr lang="fr-FR" dirty="0"/>
+              <a:t>Nécessite alors une plateforme pour la </a:t>
+            </a:r>
+            <a:r>
+              <a:rPr lang="fr-FR" dirty="0" err="1"/>
+              <a:t>quantisation</a:t>
+            </a:r>
+            <a:endParaRPr lang="fr-FR" dirty="0"/>
           </a:p>
         </p:txBody>
       </p:sp>
     </p:spTree>
     <p:extLst>
       <p:ext uri="{BB962C8B-B14F-4D97-AF65-F5344CB8AC3E}">
-        <p14:creationId xmlns:p14="http://schemas.microsoft.com/office/powerpoint/2010/main" val="2582337845"/>
+        <p14:creationId xmlns:p14="http://schemas.microsoft.com/office/powerpoint/2010/main" val="4034148337"/>
       </p:ext>
     </p:extLst>
   </p:cSld>
@@ -3881,150 +3932,6 @@
           <p:cNvPr id="2" name="Titre 1">
             <a:extLst>
               <a:ext uri="{FF2B5EF4-FFF2-40B4-BE49-F238E27FC236}">
-                <a16:creationId xmlns:a16="http://schemas.microsoft.com/office/drawing/2014/main" id="{D60E1EF0-2338-E50F-9B62-EB98A35EB5CF}"/>
-              </a:ext>
-            </a:extLst>
-          </p:cNvPr>
-          <p:cNvSpPr>
-            <a:spLocks noGrp="1"/>
-          </p:cNvSpPr>
-          <p:nvPr>
-            <p:ph type="title"/>
-          </p:nvPr>
-        </p:nvSpPr>
-        <p:spPr/>
-        <p:txBody>
-          <a:bodyPr/>
-          <a:lstStyle/>
-          <a:p>
-            <a:r>
-              <a:rPr lang="fr-FR" dirty="0" err="1"/>
-              <a:t>PyTorch</a:t>
-            </a:r>
-            <a:r>
-              <a:rPr lang="fr-FR" dirty="0"/>
-              <a:t> </a:t>
-            </a:r>
-            <a:r>
-              <a:rPr lang="fr-FR" dirty="0" err="1"/>
-              <a:t>Embeded</a:t>
-            </a:r>
-            <a:endParaRPr lang="fr-FR" dirty="0"/>
-          </a:p>
-        </p:txBody>
-      </p:sp>
-      <p:sp>
-        <p:nvSpPr>
-          <p:cNvPr id="3" name="Espace réservé du contenu 2">
-            <a:extLst>
-              <a:ext uri="{FF2B5EF4-FFF2-40B4-BE49-F238E27FC236}">
-                <a16:creationId xmlns:a16="http://schemas.microsoft.com/office/drawing/2014/main" id="{756C52CF-574A-BAF7-520C-F55D7FB344DC}"/>
-              </a:ext>
-            </a:extLst>
-          </p:cNvPr>
-          <p:cNvSpPr>
-            <a:spLocks noGrp="1"/>
-          </p:cNvSpPr>
-          <p:nvPr>
-            <p:ph idx="1"/>
-          </p:nvPr>
-        </p:nvSpPr>
-        <p:spPr/>
-        <p:txBody>
-          <a:bodyPr/>
-          <a:lstStyle/>
-          <a:p>
-            <a:r>
-              <a:rPr lang="fr-FR" dirty="0" err="1"/>
-              <a:t>ExecuTorch</a:t>
-            </a:r>
-            <a:r>
-              <a:rPr lang="fr-FR" dirty="0"/>
-              <a:t> s'appuie sur des plateformes pour générer le PTE</a:t>
-            </a:r>
-          </a:p>
-          <a:p>
-            <a:pPr lvl="1"/>
-            <a:r>
-              <a:rPr lang="fr-FR" dirty="0" err="1"/>
-              <a:t>PyTorch</a:t>
-            </a:r>
-            <a:r>
-              <a:rPr lang="fr-FR" dirty="0"/>
-              <a:t> </a:t>
-            </a:r>
-            <a:r>
-              <a:rPr lang="fr-FR" dirty="0" err="1"/>
-              <a:t>Embeded</a:t>
-            </a:r>
-            <a:endParaRPr lang="fr-FR" dirty="0"/>
-          </a:p>
-          <a:p>
-            <a:r>
-              <a:rPr lang="fr-FR" dirty="0" err="1"/>
-              <a:t>Quantisation</a:t>
-            </a:r>
-            <a:r>
-              <a:rPr lang="fr-FR" dirty="0"/>
-              <a:t> disponible</a:t>
-            </a:r>
-          </a:p>
-          <a:p>
-            <a:pPr lvl="1"/>
-            <a:r>
-              <a:rPr lang="fr-FR" dirty="0"/>
-              <a:t>En FP32 ne nécessite aucune plateforme côté serveur</a:t>
-            </a:r>
-          </a:p>
-          <a:p>
-            <a:pPr lvl="1"/>
-            <a:r>
-              <a:rPr lang="fr-FR" dirty="0"/>
-              <a:t>Nécessite alors une plateforme pour la </a:t>
-            </a:r>
-            <a:r>
-              <a:rPr lang="fr-FR" dirty="0" err="1"/>
-              <a:t>quantisation</a:t>
-            </a:r>
-            <a:endParaRPr lang="fr-FR" dirty="0"/>
-          </a:p>
-        </p:txBody>
-      </p:sp>
-    </p:spTree>
-    <p:extLst>
-      <p:ext uri="{BB962C8B-B14F-4D97-AF65-F5344CB8AC3E}">
-        <p14:creationId xmlns:p14="http://schemas.microsoft.com/office/powerpoint/2010/main" val="4034148337"/>
-      </p:ext>
-    </p:extLst>
-  </p:cSld>
-  <p:clrMapOvr>
-    <a:masterClrMapping/>
-  </p:clrMapOvr>
-</p:sld>
-</file>
-
-<file path=ppt/slides/slide12.xml><?xml version="1.0" encoding="utf-8"?>
-<p:sld xmlns:a="http://schemas.openxmlformats.org/drawingml/2006/main" xmlns:r="http://schemas.openxmlformats.org/officeDocument/2006/relationships" xmlns:p="http://schemas.openxmlformats.org/presentationml/2006/main">
-  <p:cSld>
-    <p:spTree>
-      <p:nvGrpSpPr>
-        <p:cNvPr id="1" name=""/>
-        <p:cNvGrpSpPr/>
-        <p:nvPr/>
-      </p:nvGrpSpPr>
-      <p:grpSpPr>
-        <a:xfrm>
-          <a:off x="0" y="0"/>
-          <a:ext cx="0" cy="0"/>
-          <a:chOff x="0" y="0"/>
-          <a:chExt cx="0" cy="0"/>
-        </a:xfrm>
-      </p:grpSpPr>
-      <p:sp>
-        <p:nvSpPr>
-          <p:cNvPr id="2" name="Titre 1">
-            <a:extLst>
-              <a:ext uri="{FF2B5EF4-FFF2-40B4-BE49-F238E27FC236}">
                 <a16:creationId xmlns:a16="http://schemas.microsoft.com/office/drawing/2014/main" id="{5D3F9E29-4F03-7E8B-79C7-7BAC642ED423}"/>
               </a:ext>
             </a:extLst>
@@ -4169,7 +4076,7 @@
 </p:sld>
 </file>
 
-<file path=ppt/slides/slide13.xml><?xml version="1.0" encoding="utf-8"?>
+<file path=ppt/slides/slide12.xml><?xml version="1.0" encoding="utf-8"?>
 <p:sld xmlns:a="http://schemas.openxmlformats.org/drawingml/2006/main" xmlns:r="http://schemas.openxmlformats.org/officeDocument/2006/relationships" xmlns:p="http://schemas.openxmlformats.org/presentationml/2006/main">
   <p:cSld>
     <p:spTree>
@@ -4283,6 +4190,174 @@
 </p:sld>
 </file>
 
+<file path=ppt/slides/slide13.xml><?xml version="1.0" encoding="utf-8"?>
+<p:sld xmlns:a="http://schemas.openxmlformats.org/drawingml/2006/main" xmlns:r="http://schemas.openxmlformats.org/officeDocument/2006/relationships" xmlns:p="http://schemas.openxmlformats.org/presentationml/2006/main">
+  <p:cSld>
+    <p:spTree>
+      <p:nvGrpSpPr>
+        <p:cNvPr id="1" name=""/>
+        <p:cNvGrpSpPr/>
+        <p:nvPr/>
+      </p:nvGrpSpPr>
+      <p:grpSpPr>
+        <a:xfrm>
+          <a:off x="0" y="0"/>
+          <a:ext cx="0" cy="0"/>
+          <a:chOff x="0" y="0"/>
+          <a:chExt cx="0" cy="0"/>
+        </a:xfrm>
+      </p:grpSpPr>
+      <p:sp>
+        <p:nvSpPr>
+          <p:cNvPr id="2" name="Titre 1">
+            <a:extLst>
+              <a:ext uri="{FF2B5EF4-FFF2-40B4-BE49-F238E27FC236}">
+                <a16:creationId xmlns:a16="http://schemas.microsoft.com/office/drawing/2014/main" id="{9E85AA74-CBFB-3475-9D8D-00932BA17A97}"/>
+              </a:ext>
+            </a:extLst>
+          </p:cNvPr>
+          <p:cNvSpPr>
+            <a:spLocks noGrp="1"/>
+          </p:cNvSpPr>
+          <p:nvPr>
+            <p:ph type="title"/>
+          </p:nvPr>
+        </p:nvSpPr>
+        <p:spPr/>
+        <p:txBody>
+          <a:bodyPr/>
+          <a:lstStyle/>
+          <a:p>
+            <a:r>
+              <a:rPr lang="fr-FR" dirty="0"/>
+              <a:t>Environnement de test</a:t>
+            </a:r>
+          </a:p>
+        </p:txBody>
+      </p:sp>
+      <p:sp>
+        <p:nvSpPr>
+          <p:cNvPr id="3" name="Espace réservé du contenu 2">
+            <a:extLst>
+              <a:ext uri="{FF2B5EF4-FFF2-40B4-BE49-F238E27FC236}">
+                <a16:creationId xmlns:a16="http://schemas.microsoft.com/office/drawing/2014/main" id="{EF298657-53D9-820D-377E-A5DCC7916435}"/>
+              </a:ext>
+            </a:extLst>
+          </p:cNvPr>
+          <p:cNvSpPr>
+            <a:spLocks noGrp="1"/>
+          </p:cNvSpPr>
+          <p:nvPr>
+            <p:ph idx="1"/>
+          </p:nvPr>
+        </p:nvSpPr>
+        <p:spPr/>
+        <p:txBody>
+          <a:bodyPr/>
+          <a:lstStyle/>
+          <a:p>
+            <a:r>
+              <a:rPr lang="fr-FR" dirty="0" err="1"/>
+              <a:t>XNNPack</a:t>
+            </a:r>
+            <a:r>
+              <a:rPr lang="fr-FR" dirty="0"/>
+              <a:t> ne fonctionne pas sur microcontrôleur</a:t>
+            </a:r>
+          </a:p>
+          <a:p>
+            <a:pPr lvl="1"/>
+            <a:r>
+              <a:rPr lang="fr-FR" dirty="0"/>
+              <a:t>Uniquement sur Intel, AMD, ARM comme le Raspberry Pi</a:t>
+            </a:r>
+          </a:p>
+          <a:p>
+            <a:r>
+              <a:rPr lang="fr-FR" dirty="0" err="1"/>
+              <a:t>XNNPack</a:t>
+            </a:r>
+            <a:r>
+              <a:rPr lang="fr-FR" dirty="0"/>
+              <a:t> est surtout très utile pour tester une inférence sur PC</a:t>
+            </a:r>
+          </a:p>
+          <a:p>
+            <a:pPr lvl="1"/>
+            <a:r>
+              <a:rPr lang="fr-FR" dirty="0"/>
+              <a:t>Sans passer par le </a:t>
+            </a:r>
+            <a:r>
+              <a:rPr lang="fr-FR" dirty="0" err="1"/>
+              <a:t>micro-contrôleur</a:t>
+            </a:r>
+            <a:endParaRPr lang="fr-FR" dirty="0"/>
+          </a:p>
+          <a:p>
+            <a:pPr lvl="1"/>
+            <a:r>
+              <a:rPr lang="fr-FR" dirty="0"/>
+              <a:t>Tests en Python ou C++</a:t>
+            </a:r>
+          </a:p>
+          <a:p>
+            <a:pPr lvl="1"/>
+            <a:r>
+              <a:rPr lang="fr-FR" dirty="0"/>
+              <a:t>Installation facile sur Windows et Linux</a:t>
+            </a:r>
+          </a:p>
+          <a:p>
+            <a:pPr lvl="1"/>
+            <a:r>
+              <a:rPr lang="fr-FR" dirty="0"/>
+              <a:t>Ne nécessite pas une architecture propriétaire pour compiler</a:t>
+            </a:r>
+          </a:p>
+          <a:p>
+            <a:pPr lvl="1"/>
+            <a:r>
+              <a:rPr lang="fr-FR" dirty="0"/>
+              <a:t>Par exemple ARM nécessite de compiler sur ARM</a:t>
+            </a:r>
+          </a:p>
+          <a:p>
+            <a:pPr lvl="1"/>
+            <a:r>
+              <a:rPr lang="fr-FR" dirty="0" err="1"/>
+              <a:t>Comptabile</a:t>
+            </a:r>
+            <a:r>
+              <a:rPr lang="fr-FR" dirty="0"/>
+              <a:t> CUDA et donc GPU</a:t>
+            </a:r>
+          </a:p>
+          <a:p>
+            <a:pPr marL="0" indent="0">
+              <a:buNone/>
+            </a:pPr>
+            <a:endParaRPr lang="fr-FR" dirty="0"/>
+          </a:p>
+          <a:p>
+            <a:pPr lvl="1"/>
+            <a:endParaRPr lang="fr-FR" dirty="0"/>
+          </a:p>
+        </p:txBody>
+      </p:sp>
+    </p:spTree>
+    <p:extLst>
+      <p:ext uri="{BB962C8B-B14F-4D97-AF65-F5344CB8AC3E}">
+        <p14:creationId xmlns:p14="http://schemas.microsoft.com/office/powerpoint/2010/main" val="1151949424"/>
+      </p:ext>
+    </p:extLst>
+  </p:cSld>
+  <p:clrMapOvr>
+    <a:masterClrMapping/>
+  </p:clrMapOvr>
+</p:sld>
+</file>
+
 <file path=ppt/slides/slide14.xml><?xml version="1.0" encoding="utf-8"?>
 <p:sld xmlns:a="http://schemas.openxmlformats.org/drawingml/2006/main" xmlns:r="http://schemas.openxmlformats.org/officeDocument/2006/relationships" xmlns:p="http://schemas.openxmlformats.org/presentationml/2006/main">
   <p:cSld>
@@ -4305,174 +4380,6 @@
           <p:cNvPr id="2" name="Titre 1">
             <a:extLst>
               <a:ext uri="{FF2B5EF4-FFF2-40B4-BE49-F238E27FC236}">
-                <a16:creationId xmlns:a16="http://schemas.microsoft.com/office/drawing/2014/main" id="{9E85AA74-CBFB-3475-9D8D-00932BA17A97}"/>
-              </a:ext>
-            </a:extLst>
-          </p:cNvPr>
-          <p:cNvSpPr>
-            <a:spLocks noGrp="1"/>
-          </p:cNvSpPr>
-          <p:nvPr>
-            <p:ph type="title"/>
-          </p:nvPr>
-        </p:nvSpPr>
-        <p:spPr/>
-        <p:txBody>
-          <a:bodyPr/>
-          <a:lstStyle/>
-          <a:p>
-            <a:r>
-              <a:rPr lang="fr-FR" dirty="0"/>
-              <a:t>Environnement de test</a:t>
-            </a:r>
-          </a:p>
-        </p:txBody>
-      </p:sp>
-      <p:sp>
-        <p:nvSpPr>
-          <p:cNvPr id="3" name="Espace réservé du contenu 2">
-            <a:extLst>
-              <a:ext uri="{FF2B5EF4-FFF2-40B4-BE49-F238E27FC236}">
-                <a16:creationId xmlns:a16="http://schemas.microsoft.com/office/drawing/2014/main" id="{EF298657-53D9-820D-377E-A5DCC7916435}"/>
-              </a:ext>
-            </a:extLst>
-          </p:cNvPr>
-          <p:cNvSpPr>
-            <a:spLocks noGrp="1"/>
-          </p:cNvSpPr>
-          <p:nvPr>
-            <p:ph idx="1"/>
-          </p:nvPr>
-        </p:nvSpPr>
-        <p:spPr/>
-        <p:txBody>
-          <a:bodyPr/>
-          <a:lstStyle/>
-          <a:p>
-            <a:r>
-              <a:rPr lang="fr-FR" dirty="0" err="1"/>
-              <a:t>XNNPack</a:t>
-            </a:r>
-            <a:r>
-              <a:rPr lang="fr-FR" dirty="0"/>
-              <a:t> ne fonctionne pas sur microcontrôleur</a:t>
-            </a:r>
-          </a:p>
-          <a:p>
-            <a:pPr lvl="1"/>
-            <a:r>
-              <a:rPr lang="fr-FR" dirty="0"/>
-              <a:t>Uniquement sur Intel, AMD, ARM comme le Raspberry Pi</a:t>
-            </a:r>
-          </a:p>
-          <a:p>
-            <a:r>
-              <a:rPr lang="fr-FR" dirty="0" err="1"/>
-              <a:t>XNNPack</a:t>
-            </a:r>
-            <a:r>
-              <a:rPr lang="fr-FR" dirty="0"/>
-              <a:t> est surtout très utile pour tester une inférence sur PC</a:t>
-            </a:r>
-          </a:p>
-          <a:p>
-            <a:pPr lvl="1"/>
-            <a:r>
-              <a:rPr lang="fr-FR" dirty="0"/>
-              <a:t>Sans passer par le </a:t>
-            </a:r>
-            <a:r>
-              <a:rPr lang="fr-FR" dirty="0" err="1"/>
-              <a:t>micro-contrôleur</a:t>
-            </a:r>
-            <a:endParaRPr lang="fr-FR" dirty="0"/>
-          </a:p>
-          <a:p>
-            <a:pPr lvl="1"/>
-            <a:r>
-              <a:rPr lang="fr-FR" dirty="0"/>
-              <a:t>Tests en Python ou C++</a:t>
-            </a:r>
-          </a:p>
-          <a:p>
-            <a:pPr lvl="1"/>
-            <a:r>
-              <a:rPr lang="fr-FR" dirty="0"/>
-              <a:t>Installation facile sur Windows et Linux</a:t>
-            </a:r>
-          </a:p>
-          <a:p>
-            <a:pPr lvl="1"/>
-            <a:r>
-              <a:rPr lang="fr-FR" dirty="0"/>
-              <a:t>Ne nécessite pas une architecture propriétaire pour compiler</a:t>
-            </a:r>
-          </a:p>
-          <a:p>
-            <a:pPr lvl="1"/>
-            <a:r>
-              <a:rPr lang="fr-FR" dirty="0"/>
-              <a:t>Par exemple ARM nécessite de compiler sur ARM</a:t>
-            </a:r>
-          </a:p>
-          <a:p>
-            <a:pPr lvl="1"/>
-            <a:r>
-              <a:rPr lang="fr-FR" dirty="0" err="1"/>
-              <a:t>Comptabile</a:t>
-            </a:r>
-            <a:r>
-              <a:rPr lang="fr-FR" dirty="0"/>
-              <a:t> CUDA et donc GPU</a:t>
-            </a:r>
-          </a:p>
-          <a:p>
-            <a:pPr marL="0" indent="0">
-              <a:buNone/>
-            </a:pPr>
-            <a:endParaRPr lang="fr-FR" dirty="0"/>
-          </a:p>
-          <a:p>
-            <a:pPr lvl="1"/>
-            <a:endParaRPr lang="fr-FR" dirty="0"/>
-          </a:p>
-        </p:txBody>
-      </p:sp>
-    </p:spTree>
-    <p:extLst>
-      <p:ext uri="{BB962C8B-B14F-4D97-AF65-F5344CB8AC3E}">
-        <p14:creationId xmlns:p14="http://schemas.microsoft.com/office/powerpoint/2010/main" val="1151949424"/>
-      </p:ext>
-    </p:extLst>
-  </p:cSld>
-  <p:clrMapOvr>
-    <a:masterClrMapping/>
-  </p:clrMapOvr>
-</p:sld>
-</file>
-
-<file path=ppt/slides/slide15.xml><?xml version="1.0" encoding="utf-8"?>
-<p:sld xmlns:a="http://schemas.openxmlformats.org/drawingml/2006/main" xmlns:r="http://schemas.openxmlformats.org/officeDocument/2006/relationships" xmlns:p="http://schemas.openxmlformats.org/presentationml/2006/main">
-  <p:cSld>
-    <p:spTree>
-      <p:nvGrpSpPr>
-        <p:cNvPr id="1" name=""/>
-        <p:cNvGrpSpPr/>
-        <p:nvPr/>
-      </p:nvGrpSpPr>
-      <p:grpSpPr>
-        <a:xfrm>
-          <a:off x="0" y="0"/>
-          <a:ext cx="0" cy="0"/>
-          <a:chOff x="0" y="0"/>
-          <a:chExt cx="0" cy="0"/>
-        </a:xfrm>
-      </p:grpSpPr>
-      <p:sp>
-        <p:nvSpPr>
-          <p:cNvPr id="2" name="Titre 1">
-            <a:extLst>
-              <a:ext uri="{FF2B5EF4-FFF2-40B4-BE49-F238E27FC236}">
                 <a16:creationId xmlns:a16="http://schemas.microsoft.com/office/drawing/2014/main" id="{C11F19D2-37D5-C841-43F6-3554E434E475}"/>
               </a:ext>
             </a:extLst>
@@ -4627,7 +4534,7 @@
 </p:sld>
 </file>
 
-<file path=ppt/slides/slide16.xml><?xml version="1.0" encoding="utf-8"?>
+<file path=ppt/slides/slide15.xml><?xml version="1.0" encoding="utf-8"?>
 <p:sld xmlns:a="http://schemas.openxmlformats.org/drawingml/2006/main" xmlns:r="http://schemas.openxmlformats.org/officeDocument/2006/relationships" xmlns:p="http://schemas.openxmlformats.org/presentationml/2006/main">
   <p:cSld>
     <p:spTree>
@@ -4775,6 +4682,139 @@
 </p:sld>
 </file>
 
+<file path=ppt/slides/slide16.xml><?xml version="1.0" encoding="utf-8"?>
+<p:sld xmlns:a="http://schemas.openxmlformats.org/drawingml/2006/main" xmlns:r="http://schemas.openxmlformats.org/officeDocument/2006/relationships" xmlns:p="http://schemas.openxmlformats.org/presentationml/2006/main">
+  <p:cSld>
+    <p:spTree>
+      <p:nvGrpSpPr>
+        <p:cNvPr id="1" name=""/>
+        <p:cNvGrpSpPr/>
+        <p:nvPr/>
+      </p:nvGrpSpPr>
+      <p:grpSpPr>
+        <a:xfrm>
+          <a:off x="0" y="0"/>
+          <a:ext cx="0" cy="0"/>
+          <a:chOff x="0" y="0"/>
+          <a:chExt cx="0" cy="0"/>
+        </a:xfrm>
+      </p:grpSpPr>
+      <p:sp>
+        <p:nvSpPr>
+          <p:cNvPr id="2" name="Titre 1">
+            <a:extLst>
+              <a:ext uri="{FF2B5EF4-FFF2-40B4-BE49-F238E27FC236}">
+                <a16:creationId xmlns:a16="http://schemas.microsoft.com/office/drawing/2014/main" id="{03742AE0-DF3E-05BA-2103-BAEA37DDED52}"/>
+              </a:ext>
+            </a:extLst>
+          </p:cNvPr>
+          <p:cNvSpPr>
+            <a:spLocks noGrp="1"/>
+          </p:cNvSpPr>
+          <p:nvPr>
+            <p:ph type="title"/>
+          </p:nvPr>
+        </p:nvSpPr>
+        <p:spPr/>
+        <p:txBody>
+          <a:bodyPr/>
+          <a:lstStyle/>
+          <a:p>
+            <a:r>
+              <a:rPr lang="fr-FR" dirty="0" err="1"/>
+              <a:t>Tensorflow</a:t>
+            </a:r>
+            <a:endParaRPr lang="fr-FR" dirty="0"/>
+          </a:p>
+        </p:txBody>
+      </p:sp>
+      <p:sp>
+        <p:nvSpPr>
+          <p:cNvPr id="3" name="Espace réservé du contenu 2">
+            <a:extLst>
+              <a:ext uri="{FF2B5EF4-FFF2-40B4-BE49-F238E27FC236}">
+                <a16:creationId xmlns:a16="http://schemas.microsoft.com/office/drawing/2014/main" id="{8FCFAEB6-F9C6-C273-2F44-637302BF96E5}"/>
+              </a:ext>
+            </a:extLst>
+          </p:cNvPr>
+          <p:cNvSpPr>
+            <a:spLocks noGrp="1"/>
+          </p:cNvSpPr>
+          <p:nvPr>
+            <p:ph idx="1"/>
+          </p:nvPr>
+        </p:nvSpPr>
+        <p:spPr/>
+        <p:txBody>
+          <a:bodyPr/>
+          <a:lstStyle/>
+          <a:p>
+            <a:r>
+              <a:rPr lang="fr-FR" dirty="0" err="1"/>
+              <a:t>Tensorflow</a:t>
+            </a:r>
+            <a:r>
+              <a:rPr lang="fr-FR" dirty="0"/>
+              <a:t> ne possède pas d'outils aussi puissant que PT pour la conversion vers NPU, GPU embarqué</a:t>
+            </a:r>
+          </a:p>
+          <a:p>
+            <a:r>
+              <a:rPr lang="fr-FR" dirty="0" err="1"/>
+              <a:t>LiteRT</a:t>
+            </a:r>
+            <a:r>
+              <a:rPr lang="fr-FR" dirty="0"/>
+              <a:t> possède tous les outils pour convertir les .h5 en .</a:t>
+            </a:r>
+            <a:r>
+              <a:rPr lang="fr-FR" dirty="0" err="1"/>
+              <a:t>pte</a:t>
+            </a:r>
+            <a:endParaRPr lang="fr-FR" dirty="0"/>
+          </a:p>
+          <a:p>
+            <a:pPr lvl="1"/>
+            <a:r>
+              <a:rPr lang="fr-FR" dirty="0" err="1"/>
+              <a:t>LiteRT</a:t>
+            </a:r>
+            <a:r>
+              <a:rPr lang="fr-FR" dirty="0"/>
+              <a:t> annonce bientôt le support complet comme </a:t>
+            </a:r>
+            <a:r>
+              <a:rPr lang="fr-FR" dirty="0" err="1"/>
+              <a:t>ExecuTorch</a:t>
+            </a:r>
+            <a:endParaRPr lang="fr-FR" dirty="0"/>
+          </a:p>
+          <a:p>
+            <a:pPr lvl="1"/>
+            <a:r>
+              <a:rPr lang="fr-FR" dirty="0" err="1"/>
+              <a:t>ExecuTorch</a:t>
+            </a:r>
+            <a:r>
+              <a:rPr lang="fr-FR" dirty="0"/>
+              <a:t> annonce le support des ESP32</a:t>
+            </a:r>
+          </a:p>
+        </p:txBody>
+      </p:sp>
+    </p:spTree>
+    <p:extLst>
+      <p:ext uri="{BB962C8B-B14F-4D97-AF65-F5344CB8AC3E}">
+        <p14:creationId xmlns:p14="http://schemas.microsoft.com/office/powerpoint/2010/main" val="2693525810"/>
+      </p:ext>
+    </p:extLst>
+  </p:cSld>
+  <p:clrMapOvr>
+    <a:masterClrMapping/>
+  </p:clrMapOvr>
+</p:sld>
+</file>
+
 <file path=ppt/slides/slide17.xml><?xml version="1.0" encoding="utf-8"?>
 <p:sld xmlns:a="http://schemas.openxmlformats.org/drawingml/2006/main" xmlns:r="http://schemas.openxmlformats.org/officeDocument/2006/relationships" xmlns:p="http://schemas.openxmlformats.org/presentationml/2006/main">
   <p:cSld>
@@ -4797,7 +4837,7 @@
           <p:cNvPr id="2" name="Titre 1">
             <a:extLst>
               <a:ext uri="{FF2B5EF4-FFF2-40B4-BE49-F238E27FC236}">
-                <a16:creationId xmlns:a16="http://schemas.microsoft.com/office/drawing/2014/main" id="{03742AE0-DF3E-05BA-2103-BAEA37DDED52}"/>
+                <a16:creationId xmlns:a16="http://schemas.microsoft.com/office/drawing/2014/main" id="{62922D26-AD39-0ECF-C559-321667499533}"/>
               </a:ext>
             </a:extLst>
           </p:cNvPr>
@@ -4814,10 +4854,9 @@
           <a:lstStyle/>
           <a:p>
             <a:r>
-              <a:rPr lang="fr-FR" dirty="0" err="1"/>
-              <a:t>Tensorflow</a:t>
-            </a:r>
-            <a:endParaRPr lang="fr-FR" dirty="0"/>
+              <a:rPr lang="fr-FR" dirty="0"/>
+              <a:t>TF vs PT</a:t>
+            </a:r>
           </a:p>
         </p:txBody>
       </p:sp>
@@ -4826,7 +4865,7 @@
           <p:cNvPr id="3" name="Espace réservé du contenu 2">
             <a:extLst>
               <a:ext uri="{FF2B5EF4-FFF2-40B4-BE49-F238E27FC236}">
-                <a16:creationId xmlns:a16="http://schemas.microsoft.com/office/drawing/2014/main" id="{8FCFAEB6-F9C6-C273-2F44-637302BF96E5}"/>
+                <a16:creationId xmlns:a16="http://schemas.microsoft.com/office/drawing/2014/main" id="{DBD8E9DF-F795-0507-B8A1-D5F709970213}"/>
               </a:ext>
             </a:extLst>
           </p:cNvPr>
@@ -4843,62 +4882,62 @@
           <a:lstStyle/>
           <a:p>
             <a:r>
-              <a:rPr lang="fr-FR" dirty="0" err="1"/>
-              <a:t>Tensorflow</a:t>
-            </a:r>
-            <a:r>
-              <a:rPr lang="fr-FR" dirty="0"/>
-              <a:t> ne possède pas d'outils aussi puissant que PT pour la conversion vers NPU, GPU embarqué</a:t>
-            </a:r>
-          </a:p>
-          <a:p>
-            <a:r>
-              <a:rPr lang="fr-FR" dirty="0" err="1"/>
-              <a:t>LiteRT</a:t>
-            </a:r>
-            <a:r>
-              <a:rPr lang="fr-FR" dirty="0"/>
-              <a:t> possède tous les outils pour convertir les .h5 en .</a:t>
-            </a:r>
-            <a:r>
-              <a:rPr lang="fr-FR" dirty="0" err="1"/>
-              <a:t>pte</a:t>
-            </a:r>
+              <a:rPr lang="fr-FR" dirty="0"/>
+              <a:t>Sur PC c'est équivalent</a:t>
+            </a:r>
+          </a:p>
+          <a:p>
+            <a:pPr lvl="1"/>
+            <a:r>
+              <a:rPr lang="fr-FR" dirty="0"/>
+              <a:t>TF = industrie, vision</a:t>
+            </a:r>
+          </a:p>
+          <a:p>
+            <a:pPr lvl="1"/>
+            <a:r>
+              <a:rPr lang="fr-FR" dirty="0"/>
+              <a:t>PT = recherche, LLM</a:t>
+            </a:r>
+          </a:p>
+          <a:p>
+            <a:r>
+              <a:rPr lang="fr-FR" dirty="0"/>
+              <a:t>En embarqué</a:t>
+            </a:r>
+          </a:p>
+          <a:p>
+            <a:pPr lvl="1"/>
+            <a:r>
+              <a:rPr lang="fr-FR" dirty="0"/>
+              <a:t>TF = petits microcontrôleurs &lt; 1 Mo ou &lt; 4 Mo</a:t>
+            </a:r>
+          </a:p>
+          <a:p>
+            <a:pPr lvl="1"/>
+            <a:r>
+              <a:rPr lang="fr-FR" dirty="0"/>
+              <a:t>PT = </a:t>
+            </a:r>
+            <a:r>
+              <a:rPr lang="fr-FR"/>
+              <a:t>gros microcontrôleurs, </a:t>
+            </a:r>
+            <a:r>
+              <a:rPr lang="fr-FR" dirty="0"/>
+              <a:t>NPU, GPU embarqué</a:t>
+            </a:r>
+          </a:p>
+          <a:p>
+            <a:pPr lvl="1"/>
             <a:endParaRPr lang="fr-FR" dirty="0"/>
-          </a:p>
-          <a:p>
-            <a:pPr lvl="1"/>
-            <a:r>
-              <a:rPr lang="fr-FR" dirty="0" err="1"/>
-              <a:t>LiteRT</a:t>
-            </a:r>
-            <a:r>
-              <a:rPr lang="fr-FR" dirty="0"/>
-              <a:t> annonce bientôt le support complet comme </a:t>
-            </a:r>
-            <a:r>
-              <a:rPr lang="fr-FR" dirty="0" err="1"/>
-              <a:t>ExecuTorch</a:t>
-            </a:r>
-            <a:endParaRPr lang="fr-FR" dirty="0"/>
-          </a:p>
-          <a:p>
-            <a:pPr lvl="1"/>
-            <a:r>
-              <a:rPr lang="fr-FR" dirty="0" err="1"/>
-              <a:t>ExecuTorch</a:t>
-            </a:r>
-            <a:r>
-              <a:rPr lang="fr-FR" dirty="0"/>
-              <a:t> annonce le support des ESP32</a:t>
-            </a:r>
           </a:p>
         </p:txBody>
       </p:sp>
     </p:spTree>
     <p:extLst>
       <p:ext uri="{BB962C8B-B14F-4D97-AF65-F5344CB8AC3E}">
-        <p14:creationId xmlns:p14="http://schemas.microsoft.com/office/powerpoint/2010/main" val="2693525810"/>
+        <p14:creationId xmlns:p14="http://schemas.microsoft.com/office/powerpoint/2010/main" val="2160926850"/>
       </p:ext>
     </p:extLst>
   </p:cSld>
@@ -4930,7 +4969,7 @@
           <p:cNvPr id="2" name="Titre 1">
             <a:extLst>
               <a:ext uri="{FF2B5EF4-FFF2-40B4-BE49-F238E27FC236}">
-                <a16:creationId xmlns:a16="http://schemas.microsoft.com/office/drawing/2014/main" id="{62922D26-AD39-0ECF-C559-321667499533}"/>
+                <a16:creationId xmlns:a16="http://schemas.microsoft.com/office/drawing/2014/main" id="{C650BDD0-94AA-BB01-2277-71F318FEF835}"/>
               </a:ext>
             </a:extLst>
           </p:cNvPr>
@@ -4948,7 +4987,7 @@
           <a:p>
             <a:r>
               <a:rPr lang="fr-FR" dirty="0"/>
-              <a:t>TF vs PT</a:t>
+              <a:t>Les autres plateformes</a:t>
             </a:r>
           </a:p>
         </p:txBody>
@@ -4958,7 +4997,7 @@
           <p:cNvPr id="3" name="Espace réservé du contenu 2">
             <a:extLst>
               <a:ext uri="{FF2B5EF4-FFF2-40B4-BE49-F238E27FC236}">
-                <a16:creationId xmlns:a16="http://schemas.microsoft.com/office/drawing/2014/main" id="{DBD8E9DF-F795-0507-B8A1-D5F709970213}"/>
+                <a16:creationId xmlns:a16="http://schemas.microsoft.com/office/drawing/2014/main" id="{400A9885-F03B-80D9-E13D-CDF8C0661AE5}"/>
               </a:ext>
             </a:extLst>
           </p:cNvPr>
@@ -4976,53 +5015,66 @@
           <a:p>
             <a:r>
               <a:rPr lang="fr-FR" dirty="0"/>
-              <a:t>Sur PC c'est équivalent</a:t>
-            </a:r>
+              <a:t>Il est donc possible de tester le GPU via CUDA et </a:t>
+            </a:r>
+            <a:r>
+              <a:rPr lang="fr-FR" dirty="0" err="1"/>
+              <a:t>XNNPack</a:t>
+            </a:r>
+            <a:endParaRPr lang="fr-FR" dirty="0"/>
           </a:p>
           <a:p>
             <a:pPr lvl="1"/>
             <a:r>
               <a:rPr lang="fr-FR" dirty="0"/>
-              <a:t>TF = industrie, vision</a:t>
+              <a:t>Il suffit que CUDA soit installé</a:t>
+            </a:r>
+          </a:p>
+          <a:p>
+            <a:r>
+              <a:rPr lang="fr-FR" dirty="0"/>
+              <a:t>ARM Cortex M</a:t>
             </a:r>
           </a:p>
           <a:p>
             <a:pPr lvl="1"/>
             <a:r>
               <a:rPr lang="fr-FR" dirty="0"/>
-              <a:t>PT = recherche, LLM</a:t>
-            </a:r>
-          </a:p>
-          <a:p>
-            <a:r>
-              <a:rPr lang="fr-FR" dirty="0"/>
-              <a:t>En embarqué</a:t>
+              <a:t>Il est possible d'utiliser un ARM avec GPU</a:t>
             </a:r>
           </a:p>
           <a:p>
             <a:pPr lvl="1"/>
             <a:r>
               <a:rPr lang="fr-FR" dirty="0"/>
-              <a:t>TF = petits microcontrôleurs &lt; 1 Mo ou &lt; 4 Mo</a:t>
+              <a:t>Difficile à utiliser en formation car la </a:t>
+            </a:r>
+            <a:r>
+              <a:rPr lang="fr-FR" dirty="0" err="1"/>
+              <a:t>quantisation</a:t>
+            </a:r>
+            <a:r>
+              <a:rPr lang="fr-FR" dirty="0"/>
+              <a:t> et la prédiction doivent être compilées en ARM</a:t>
+            </a:r>
+          </a:p>
+          <a:p>
+            <a:r>
+              <a:rPr lang="fr-FR" dirty="0"/>
+              <a:t>NXP</a:t>
             </a:r>
           </a:p>
           <a:p>
             <a:pPr lvl="1"/>
             <a:r>
               <a:rPr lang="fr-FR" dirty="0"/>
-              <a:t>PT = </a:t>
-            </a:r>
-            <a:r>
-              <a:rPr lang="fr-FR"/>
-              <a:t>gros microcontrôleurs, </a:t>
-            </a:r>
-            <a:r>
-              <a:rPr lang="fr-FR" dirty="0"/>
-              <a:t>NPU, GPU embarqué</a:t>
-            </a:r>
-          </a:p>
-          <a:p>
-            <a:pPr lvl="1"/>
+              <a:t>NPU</a:t>
+            </a:r>
+          </a:p>
+          <a:p>
+            <a:endParaRPr lang="fr-FR" dirty="0"/>
+          </a:p>
+          <a:p>
             <a:endParaRPr lang="fr-FR" dirty="0"/>
           </a:p>
         </p:txBody>
@@ -5030,7 +5082,7 @@
     </p:spTree>
     <p:extLst>
       <p:ext uri="{BB962C8B-B14F-4D97-AF65-F5344CB8AC3E}">
-        <p14:creationId xmlns:p14="http://schemas.microsoft.com/office/powerpoint/2010/main" val="2160926850"/>
+        <p14:creationId xmlns:p14="http://schemas.microsoft.com/office/powerpoint/2010/main" val="3932626197"/>
       </p:ext>
     </p:extLst>
   </p:cSld>
@@ -5292,151 +5344,6 @@
 </p:sld>
 </file>
 
-<file path=ppt/slides/slide20.xml><?xml version="1.0" encoding="utf-8"?>
-<p:sld xmlns:a="http://schemas.openxmlformats.org/drawingml/2006/main" xmlns:r="http://schemas.openxmlformats.org/officeDocument/2006/relationships" xmlns:p="http://schemas.openxmlformats.org/presentationml/2006/main">
-  <p:cSld>
-    <p:spTree>
-      <p:nvGrpSpPr>
-        <p:cNvPr id="1" name=""/>
-        <p:cNvGrpSpPr/>
-        <p:nvPr/>
-      </p:nvGrpSpPr>
-      <p:grpSpPr>
-        <a:xfrm>
-          <a:off x="0" y="0"/>
-          <a:ext cx="0" cy="0"/>
-          <a:chOff x="0" y="0"/>
-          <a:chExt cx="0" cy="0"/>
-        </a:xfrm>
-      </p:grpSpPr>
-      <p:sp>
-        <p:nvSpPr>
-          <p:cNvPr id="2" name="Titre 1">
-            <a:extLst>
-              <a:ext uri="{FF2B5EF4-FFF2-40B4-BE49-F238E27FC236}">
-                <a16:creationId xmlns:a16="http://schemas.microsoft.com/office/drawing/2014/main" id="{C650BDD0-94AA-BB01-2277-71F318FEF835}"/>
-              </a:ext>
-            </a:extLst>
-          </p:cNvPr>
-          <p:cNvSpPr>
-            <a:spLocks noGrp="1"/>
-          </p:cNvSpPr>
-          <p:nvPr>
-            <p:ph type="title"/>
-          </p:nvPr>
-        </p:nvSpPr>
-        <p:spPr/>
-        <p:txBody>
-          <a:bodyPr/>
-          <a:lstStyle/>
-          <a:p>
-            <a:r>
-              <a:rPr lang="fr-FR" dirty="0"/>
-              <a:t>Les autres plateformes</a:t>
-            </a:r>
-          </a:p>
-        </p:txBody>
-      </p:sp>
-      <p:sp>
-        <p:nvSpPr>
-          <p:cNvPr id="3" name="Espace réservé du contenu 2">
-            <a:extLst>
-              <a:ext uri="{FF2B5EF4-FFF2-40B4-BE49-F238E27FC236}">
-                <a16:creationId xmlns:a16="http://schemas.microsoft.com/office/drawing/2014/main" id="{400A9885-F03B-80D9-E13D-CDF8C0661AE5}"/>
-              </a:ext>
-            </a:extLst>
-          </p:cNvPr>
-          <p:cNvSpPr>
-            <a:spLocks noGrp="1"/>
-          </p:cNvSpPr>
-          <p:nvPr>
-            <p:ph idx="1"/>
-          </p:nvPr>
-        </p:nvSpPr>
-        <p:spPr/>
-        <p:txBody>
-          <a:bodyPr/>
-          <a:lstStyle/>
-          <a:p>
-            <a:r>
-              <a:rPr lang="fr-FR" dirty="0"/>
-              <a:t>Il est donc possible de tester le GPU via CUDA et </a:t>
-            </a:r>
-            <a:r>
-              <a:rPr lang="fr-FR" dirty="0" err="1"/>
-              <a:t>XNNPack</a:t>
-            </a:r>
-            <a:endParaRPr lang="fr-FR" dirty="0"/>
-          </a:p>
-          <a:p>
-            <a:pPr lvl="1"/>
-            <a:r>
-              <a:rPr lang="fr-FR" dirty="0"/>
-              <a:t>Il suffit que CUDA soit installé</a:t>
-            </a:r>
-          </a:p>
-          <a:p>
-            <a:r>
-              <a:rPr lang="fr-FR" dirty="0"/>
-              <a:t>ARM Cortex M</a:t>
-            </a:r>
-          </a:p>
-          <a:p>
-            <a:pPr lvl="1"/>
-            <a:r>
-              <a:rPr lang="fr-FR" dirty="0"/>
-              <a:t>Il est possible d'utiliser un ARM avec GPU</a:t>
-            </a:r>
-          </a:p>
-          <a:p>
-            <a:pPr lvl="1"/>
-            <a:r>
-              <a:rPr lang="fr-FR" dirty="0"/>
-              <a:t>Difficile à utiliser en formation car la </a:t>
-            </a:r>
-            <a:r>
-              <a:rPr lang="fr-FR" dirty="0" err="1"/>
-              <a:t>quantisation</a:t>
-            </a:r>
-            <a:r>
-              <a:rPr lang="fr-FR" dirty="0"/>
-              <a:t> et la prédiction doivent être compilées en ARM</a:t>
-            </a:r>
-          </a:p>
-          <a:p>
-            <a:r>
-              <a:rPr lang="fr-FR" dirty="0"/>
-              <a:t>NXP</a:t>
-            </a:r>
-          </a:p>
-          <a:p>
-            <a:pPr lvl="1"/>
-            <a:r>
-              <a:rPr lang="fr-FR" dirty="0"/>
-              <a:t>NPU</a:t>
-            </a:r>
-          </a:p>
-          <a:p>
-            <a:endParaRPr lang="fr-FR" dirty="0"/>
-          </a:p>
-          <a:p>
-            <a:endParaRPr lang="fr-FR" dirty="0"/>
-          </a:p>
-        </p:txBody>
-      </p:sp>
-    </p:spTree>
-    <p:extLst>
-      <p:ext uri="{BB962C8B-B14F-4D97-AF65-F5344CB8AC3E}">
-        <p14:creationId xmlns:p14="http://schemas.microsoft.com/office/powerpoint/2010/main" val="3932626197"/>
-      </p:ext>
-    </p:extLst>
-  </p:cSld>
-  <p:clrMapOvr>
-    <a:masterClrMapping/>
-  </p:clrMapOvr>
-</p:sld>
-</file>
-
 <file path=ppt/slides/slide3.xml><?xml version="1.0" encoding="utf-8"?>
 <p:sld xmlns:a="http://schemas.openxmlformats.org/drawingml/2006/main" xmlns:r="http://schemas.openxmlformats.org/officeDocument/2006/relationships" xmlns:p="http://schemas.openxmlformats.org/presentationml/2006/main">
   <p:cSld>
@@ -5914,127 +5821,6 @@
 </file>
 
 <file path=ppt/slides/slide7.xml><?xml version="1.0" encoding="utf-8"?>
-<p:sld xmlns:a="http://schemas.openxmlformats.org/drawingml/2006/main" xmlns:r="http://schemas.openxmlformats.org/officeDocument/2006/relationships" xmlns:p="http://schemas.openxmlformats.org/presentationml/2006/main">
-  <p:cSld>
-    <p:spTree>
-      <p:nvGrpSpPr>
-        <p:cNvPr id="1" name=""/>
-        <p:cNvGrpSpPr/>
-        <p:nvPr/>
-      </p:nvGrpSpPr>
-      <p:grpSpPr>
-        <a:xfrm>
-          <a:off x="0" y="0"/>
-          <a:ext cx="0" cy="0"/>
-          <a:chOff x="0" y="0"/>
-          <a:chExt cx="0" cy="0"/>
-        </a:xfrm>
-      </p:grpSpPr>
-      <p:sp>
-        <p:nvSpPr>
-          <p:cNvPr id="2" name="Titre 1">
-            <a:extLst>
-              <a:ext uri="{FF2B5EF4-FFF2-40B4-BE49-F238E27FC236}">
-                <a16:creationId xmlns:a16="http://schemas.microsoft.com/office/drawing/2014/main" id="{513E62BB-1AA3-699C-12A5-D875DC0035E4}"/>
-              </a:ext>
-            </a:extLst>
-          </p:cNvPr>
-          <p:cNvSpPr>
-            <a:spLocks noGrp="1"/>
-          </p:cNvSpPr>
-          <p:nvPr>
-            <p:ph type="title"/>
-          </p:nvPr>
-        </p:nvSpPr>
-        <p:spPr/>
-        <p:txBody>
-          <a:bodyPr/>
-          <a:lstStyle/>
-          <a:p>
-            <a:r>
-              <a:rPr lang="fr-FR" dirty="0"/>
-              <a:t>Langages</a:t>
-            </a:r>
-          </a:p>
-        </p:txBody>
-      </p:sp>
-      <p:sp>
-        <p:nvSpPr>
-          <p:cNvPr id="3" name="Espace réservé du contenu 2">
-            <a:extLst>
-              <a:ext uri="{FF2B5EF4-FFF2-40B4-BE49-F238E27FC236}">
-                <a16:creationId xmlns:a16="http://schemas.microsoft.com/office/drawing/2014/main" id="{EB363C27-D278-6DB1-0599-EB0159BED738}"/>
-              </a:ext>
-            </a:extLst>
-          </p:cNvPr>
-          <p:cNvSpPr>
-            <a:spLocks noGrp="1"/>
-          </p:cNvSpPr>
-          <p:nvPr>
-            <p:ph idx="1"/>
-          </p:nvPr>
-        </p:nvSpPr>
-        <p:spPr/>
-        <p:txBody>
-          <a:bodyPr/>
-          <a:lstStyle/>
-          <a:p>
-            <a:r>
-              <a:rPr lang="fr-FR" dirty="0"/>
-              <a:t>Compatibilité avec de nombreux langages</a:t>
-            </a:r>
-          </a:p>
-          <a:p>
-            <a:pPr lvl="1"/>
-            <a:r>
-              <a:rPr lang="fr-FR" dirty="0"/>
-              <a:t>Java</a:t>
-            </a:r>
-          </a:p>
-          <a:p>
-            <a:pPr lvl="1"/>
-            <a:r>
-              <a:rPr lang="fr-FR" dirty="0"/>
-              <a:t>Swift</a:t>
-            </a:r>
-          </a:p>
-          <a:p>
-            <a:pPr lvl="1"/>
-            <a:r>
-              <a:rPr lang="fr-FR" dirty="0"/>
-              <a:t>Objective-C</a:t>
-            </a:r>
-          </a:p>
-          <a:p>
-            <a:pPr lvl="1"/>
-            <a:r>
-              <a:rPr lang="fr-FR" dirty="0"/>
-              <a:t>C++ : librairie embarqué TFML</a:t>
-            </a:r>
-          </a:p>
-          <a:p>
-            <a:pPr lvl="1"/>
-            <a:r>
-              <a:rPr lang="fr-FR" dirty="0"/>
-              <a:t>Python</a:t>
-            </a:r>
-          </a:p>
-        </p:txBody>
-      </p:sp>
-    </p:spTree>
-    <p:extLst>
-      <p:ext uri="{BB962C8B-B14F-4D97-AF65-F5344CB8AC3E}">
-        <p14:creationId xmlns:p14="http://schemas.microsoft.com/office/powerpoint/2010/main" val="413611580"/>
-      </p:ext>
-    </p:extLst>
-  </p:cSld>
-  <p:clrMapOvr>
-    <a:masterClrMapping/>
-  </p:clrMapOvr>
-</p:sld>
-</file>
-
-<file path=ppt/slides/slide8.xml><?xml version="1.0" encoding="utf-8"?>
 <p:sld xmlns:a="http://schemas.openxmlformats.org/drawingml/2006/main" xmlns:r="http://schemas.openxmlformats.org/officeDocument/2006/relationships" xmlns:p="http://schemas.openxmlformats.org/presentationml/2006/main">
   <p:cSld>
     <p:spTree>
@@ -6153,6 +5939,127 @@
 </p:sld>
 </file>
 
+<file path=ppt/slides/slide8.xml><?xml version="1.0" encoding="utf-8"?>
+<p:sld xmlns:a="http://schemas.openxmlformats.org/drawingml/2006/main" xmlns:r="http://schemas.openxmlformats.org/officeDocument/2006/relationships" xmlns:p="http://schemas.openxmlformats.org/presentationml/2006/main">
+  <p:cSld>
+    <p:spTree>
+      <p:nvGrpSpPr>
+        <p:cNvPr id="1" name=""/>
+        <p:cNvGrpSpPr/>
+        <p:nvPr/>
+      </p:nvGrpSpPr>
+      <p:grpSpPr>
+        <a:xfrm>
+          <a:off x="0" y="0"/>
+          <a:ext cx="0" cy="0"/>
+          <a:chOff x="0" y="0"/>
+          <a:chExt cx="0" cy="0"/>
+        </a:xfrm>
+      </p:grpSpPr>
+      <p:sp>
+        <p:nvSpPr>
+          <p:cNvPr id="2" name="Titre 1">
+            <a:extLst>
+              <a:ext uri="{FF2B5EF4-FFF2-40B4-BE49-F238E27FC236}">
+                <a16:creationId xmlns:a16="http://schemas.microsoft.com/office/drawing/2014/main" id="{274FCB78-4BFB-476D-A41F-FF53E17D9BF4}"/>
+              </a:ext>
+            </a:extLst>
+          </p:cNvPr>
+          <p:cNvSpPr>
+            <a:spLocks noGrp="1"/>
+          </p:cNvSpPr>
+          <p:nvPr>
+            <p:ph type="title"/>
+          </p:nvPr>
+        </p:nvSpPr>
+        <p:spPr/>
+        <p:txBody>
+          <a:bodyPr/>
+          <a:lstStyle/>
+          <a:p>
+            <a:r>
+              <a:rPr lang="fr-FR" dirty="0"/>
+              <a:t>Limites</a:t>
+            </a:r>
+          </a:p>
+        </p:txBody>
+      </p:sp>
+      <p:sp>
+        <p:nvSpPr>
+          <p:cNvPr id="3" name="Espace réservé du contenu 2">
+            <a:extLst>
+              <a:ext uri="{FF2B5EF4-FFF2-40B4-BE49-F238E27FC236}">
+                <a16:creationId xmlns:a16="http://schemas.microsoft.com/office/drawing/2014/main" id="{2DEF7473-7C72-1FD4-741D-17FDD458DB93}"/>
+              </a:ext>
+            </a:extLst>
+          </p:cNvPr>
+          <p:cNvSpPr>
+            <a:spLocks noGrp="1"/>
+          </p:cNvSpPr>
+          <p:nvPr>
+            <p:ph idx="1"/>
+          </p:nvPr>
+        </p:nvSpPr>
+        <p:spPr/>
+        <p:txBody>
+          <a:bodyPr/>
+          <a:lstStyle/>
+          <a:p>
+            <a:r>
+              <a:rPr lang="fr-FR" dirty="0"/>
+              <a:t>Compatibilité avec un sous-ensemble limité d'opérations </a:t>
+            </a:r>
+            <a:r>
+              <a:rPr lang="fr-FR" dirty="0" err="1"/>
+              <a:t>PyTorch</a:t>
+            </a:r>
+            <a:endParaRPr lang="fr-FR" dirty="0"/>
+          </a:p>
+          <a:p>
+            <a:r>
+              <a:rPr lang="fr-FR" dirty="0"/>
+              <a:t>Compatibilité avec un nombre limité d'appareils</a:t>
+            </a:r>
+          </a:p>
+          <a:p>
+            <a:r>
+              <a:rPr lang="fr-FR" dirty="0"/>
+              <a:t>API C++ de bas niveau nécessitant une gestion manuelle de la mémoire</a:t>
+            </a:r>
+          </a:p>
+          <a:p>
+            <a:pPr lvl="1"/>
+            <a:r>
+              <a:rPr lang="fr-FR" dirty="0"/>
+              <a:t>Pas de </a:t>
+            </a:r>
+            <a:r>
+              <a:rPr lang="fr-FR" dirty="0" err="1"/>
+              <a:t>MicroPython</a:t>
+            </a:r>
+            <a:endParaRPr lang="fr-FR" dirty="0"/>
+          </a:p>
+          <a:p>
+            <a:r>
+              <a:rPr lang="fr-FR" dirty="0"/>
+              <a:t>L'entraînement sur l'appareil n'est pas disponible</a:t>
+            </a:r>
+          </a:p>
+        </p:txBody>
+      </p:sp>
+    </p:spTree>
+    <p:extLst>
+      <p:ext uri="{BB962C8B-B14F-4D97-AF65-F5344CB8AC3E}">
+        <p14:creationId xmlns:p14="http://schemas.microsoft.com/office/powerpoint/2010/main" val="3813616024"/>
+      </p:ext>
+    </p:extLst>
+  </p:cSld>
+  <p:clrMapOvr>
+    <a:masterClrMapping/>
+  </p:clrMapOvr>
+</p:sld>
+</file>
+
 <file path=ppt/slides/slide9.xml><?xml version="1.0" encoding="utf-8"?>
 <p:sld xmlns:a="http://schemas.openxmlformats.org/drawingml/2006/main" xmlns:r="http://schemas.openxmlformats.org/officeDocument/2006/relationships" xmlns:p="http://schemas.openxmlformats.org/presentationml/2006/main">
   <p:cSld>
@@ -6175,7 +6082,7 @@
           <p:cNvPr id="2" name="Titre 1">
             <a:extLst>
               <a:ext uri="{FF2B5EF4-FFF2-40B4-BE49-F238E27FC236}">
-                <a16:creationId xmlns:a16="http://schemas.microsoft.com/office/drawing/2014/main" id="{274FCB78-4BFB-476D-A41F-FF53E17D9BF4}"/>
+                <a16:creationId xmlns:a16="http://schemas.microsoft.com/office/drawing/2014/main" id="{739299C7-45F1-CB31-0C77-60B208C9F4CA}"/>
               </a:ext>
             </a:extLst>
           </p:cNvPr>
@@ -6193,7 +6100,7 @@
           <a:p>
             <a:r>
               <a:rPr lang="fr-FR" dirty="0"/>
-              <a:t>Limites</a:t>
+              <a:t>Performances</a:t>
             </a:r>
           </a:p>
         </p:txBody>
@@ -6203,7 +6110,7 @@
           <p:cNvPr id="3" name="Espace réservé du contenu 2">
             <a:extLst>
               <a:ext uri="{FF2B5EF4-FFF2-40B4-BE49-F238E27FC236}">
-                <a16:creationId xmlns:a16="http://schemas.microsoft.com/office/drawing/2014/main" id="{2DEF7473-7C72-1FD4-741D-17FDD458DB93}"/>
+                <a16:creationId xmlns:a16="http://schemas.microsoft.com/office/drawing/2014/main" id="{1107D6C1-ECDF-54DE-2F7E-342C74572A72}"/>
               </a:ext>
             </a:extLst>
           </p:cNvPr>
@@ -6221,42 +6128,13 @@
           <a:p>
             <a:r>
               <a:rPr lang="fr-FR" dirty="0"/>
-              <a:t>Compatibilité avec un sous-ensemble limité d'opérations </a:t>
-            </a:r>
-            <a:r>
-              <a:rPr lang="fr-FR" dirty="0" err="1"/>
-              <a:t>PyTorch</a:t>
-            </a:r>
-            <a:endParaRPr lang="fr-FR" dirty="0"/>
-          </a:p>
-          <a:p>
-            <a:r>
-              <a:rPr lang="fr-FR" dirty="0"/>
-              <a:t>Compatibilité avec un nombre limité d'appareils</a:t>
-            </a:r>
-          </a:p>
-          <a:p>
-            <a:r>
-              <a:rPr lang="fr-FR" dirty="0"/>
-              <a:t>API C++ de bas niveau nécessitant une gestion manuelle de la mémoire</a:t>
-            </a:r>
-          </a:p>
-          <a:p>
-            <a:pPr lvl="1"/>
-            <a:r>
-              <a:rPr lang="fr-FR" dirty="0"/>
-              <a:t>Pas de </a:t>
-            </a:r>
-            <a:r>
-              <a:rPr lang="fr-FR" dirty="0" err="1"/>
-              <a:t>MicroPython</a:t>
-            </a:r>
-            <a:endParaRPr lang="fr-FR" dirty="0"/>
-          </a:p>
-          <a:p>
-            <a:r>
-              <a:rPr lang="fr-FR" dirty="0"/>
-              <a:t>L'entraînement sur l'appareil n'est pas disponible</a:t>
+              <a:t>Hautes performances, avec accélération matérielle et optimisation du modèle</a:t>
+            </a:r>
+          </a:p>
+          <a:p>
+            <a:r>
+              <a:rPr lang="fr-FR" dirty="0"/>
+              <a:t>Compatible GPU, NPU &amp; DSP</a:t>
             </a:r>
           </a:p>
         </p:txBody>
@@ -6264,7 +6142,7 @@
     </p:spTree>
     <p:extLst>
       <p:ext uri="{BB962C8B-B14F-4D97-AF65-F5344CB8AC3E}">
-        <p14:creationId xmlns:p14="http://schemas.microsoft.com/office/powerpoint/2010/main" val="3813616024"/>
+        <p14:creationId xmlns:p14="http://schemas.microsoft.com/office/powerpoint/2010/main" val="2582337845"/>
       </p:ext>
     </p:extLst>
   </p:cSld>
